--- a/BACKUP&RECOVERY/05장/05장_NOARCHIVELOG_복구_UNDO_TEMP_디스크장애.pptx
+++ b/BACKUP&RECOVERY/05장/05장_NOARCHIVELOG_복구_UNDO_TEMP_디스크장애.pptx
@@ -6323,7 +6323,7 @@
                 <a:latin typeface="Consolas"/>
                 <a:ea typeface="Consolas"/>
               </a:rPr>
-              <a:t>SYS@orcl&gt; !rm -f /u01/app/oracle/oradata/ORCL/undotbs01.dbf</a:t>
+              <a:t>SYS@orcl&gt; !rm -f /u01/app/oracle/oradata/orcl/undotbs01.dbf</a:t>
             </a:r>
           </a:p>
           <a:p>
@@ -6408,7 +6408,7 @@
                 <a:latin typeface="Consolas"/>
                 <a:ea typeface="Consolas"/>
               </a:rPr>
-              <a:t>ORA-01110: data file 4: '/u01/app/oracle/oradata/ORCL/undotbs01.dbf'</a:t>
+              <a:t>ORA-01110: data file 4: '/u01/app/oracle/oradata/orcl/undotbs01.dbf'</a:t>
             </a:r>
           </a:p>
           <a:p>
@@ -6459,7 +6459,7 @@
                 <a:latin typeface="Consolas"/>
                 <a:ea typeface="Consolas"/>
               </a:rPr>
-              <a:t>SYS@orcl&gt; !cp -p /home/oracle/backup/ch05/undotbs01.dbf /u01/app/oracle/oradata/ORCL/</a:t>
+              <a:t>SYS@orcl&gt; !cp -p /home/oracle/backup/ch05/undotbs01.dbf /u01/app/oracle/oradata/orcl/</a:t>
             </a:r>
           </a:p>
           <a:p>
@@ -6948,7 +6948,7 @@
                 <a:latin typeface="Consolas"/>
                 <a:ea typeface="Consolas"/>
               </a:rPr>
-              <a:t>SYS@orcl&gt; !rm -f /u01/app/oracle/oradata/ORCL/undotbs01.dbf</a:t>
+              <a:t>SYS@orcl&gt; !rm -f /u01/app/oracle/oradata/orcl/undotbs01.dbf</a:t>
             </a:r>
           </a:p>
           <a:p>
@@ -7135,7 +7135,7 @@
                 <a:latin typeface="Consolas"/>
                 <a:ea typeface="Consolas"/>
               </a:rPr>
-              <a:t>SYS@orcl&gt; !cp -p /home/oracle/backup/ch05/undotbs01.dbf /u01/app/oracle/oradata/ORCL/</a:t>
+              <a:t>SYS@orcl&gt; !cp -p /home/oracle/backup/ch05/undotbs01.dbf /u01/app/oracle/oradata/orcl/</a:t>
             </a:r>
           </a:p>
           <a:p>
@@ -8083,24 +8083,24 @@
                 <a:latin typeface="Consolas"/>
                 <a:ea typeface="Consolas"/>
               </a:rPr>
-              <a:t>SYS@orcl&gt; !rm -f /u01/app/oracle/oradata/ORCL/temp01.dbf</a:t>
-            </a:r>
-          </a:p>
-          <a:p>
-            <a:pPr>
-              <a:spcAft>
-                <a:spcPts val="0"/>
-              </a:spcAft>
-            </a:pPr>
-            <a:r>
-              <a:rPr sz="1250" b="0">
-                <a:solidFill>
-                  <a:srgbClr val="E6E6E6"/>
-                </a:solidFill>
-                <a:latin typeface="Consolas"/>
-                <a:ea typeface="Consolas"/>
-              </a:rPr>
-              <a:t>SYS@orcl&gt; !ls /u01/app/oracle/oradata/ORCL/temp01.dbf</a:t>
+              <a:t>SYS@orcl&gt; !rm -f /u01/app/oracle/oradata/orcl/temp01.dbf</a:t>
+            </a:r>
+          </a:p>
+          <a:p>
+            <a:pPr>
+              <a:spcAft>
+                <a:spcPts val="0"/>
+              </a:spcAft>
+            </a:pPr>
+            <a:r>
+              <a:rPr sz="1250" b="0">
+                <a:solidFill>
+                  <a:srgbClr val="E6E6E6"/>
+                </a:solidFill>
+                <a:latin typeface="Consolas"/>
+                <a:ea typeface="Consolas"/>
+              </a:rPr>
+              <a:t>SYS@orcl&gt; !ls /u01/app/oracle/oradata/orcl/temp01.dbf</a:t>
             </a:r>
           </a:p>
           <a:p>
@@ -8287,7 +8287,7 @@
                 <a:latin typeface="Consolas"/>
                 <a:ea typeface="Consolas"/>
               </a:rPr>
-              <a:t>Re-creating tempfile /u01/app/oracle/oradata/ORCL/temp01.dbf</a:t>
+              <a:t>Re-creating tempfile /u01/app/oracle/oradata/orcl/temp01.dbf</a:t>
             </a:r>
           </a:p>
           <a:p>
@@ -8372,7 +8372,7 @@
                 <a:latin typeface="Consolas"/>
                 <a:ea typeface="Consolas"/>
               </a:rPr>
-              <a:t>         1 /u01/app/oracle/oradata/ORCL/temp01.dbf      60 ONLINE</a:t>
+              <a:t>         1 /u01/app/oracle/oradata/orcl/temp01.dbf      60 ONLINE</a:t>
             </a:r>
           </a:p>
         </p:txBody>
@@ -8606,7 +8606,7 @@
                 <a:latin typeface="Consolas"/>
                 <a:ea typeface="Consolas"/>
               </a:rPr>
-              <a:t>SYS@orcl&gt; !rm -f /u01/app/oracle/oradata/ORCL/temp01.dbf</a:t>
+              <a:t>SYS@orcl&gt; !rm -f /u01/app/oracle/oradata/orcl/temp01.dbf</a:t>
             </a:r>
           </a:p>
           <a:p>
@@ -8691,7 +8691,7 @@
                 <a:latin typeface="Consolas"/>
                 <a:ea typeface="Consolas"/>
               </a:rPr>
-              <a:t>ORA-01110: data file 201: '/u01/app/oracle/oradata/ORCL/temp01.dbf'</a:t>
+              <a:t>ORA-01110: data file 201: '/u01/app/oracle/oradata/orcl/temp01.dbf'</a:t>
             </a:r>
           </a:p>
           <a:p>
@@ -8776,7 +8776,7 @@
                 <a:latin typeface="Consolas"/>
                 <a:ea typeface="Consolas"/>
               </a:rPr>
-              <a:t>  2    '/u01/app/oracle/oradata/ORCL/temp02.dbf' SIZE 60M;</a:t>
+              <a:t>  2    '/u01/app/oracle/oradata/orcl/temp02.dbf' SIZE 60M;</a:t>
             </a:r>
           </a:p>
           <a:p>
@@ -8827,7 +8827,7 @@
                 <a:latin typeface="Consolas"/>
                 <a:ea typeface="Consolas"/>
               </a:rPr>
-              <a:t>SYS@orcl&gt; ALTER DATABASE TEMPFILE '/u01/app/oracle/oradata/ORCL/temp01.dbf' DROP;</a:t>
+              <a:t>SYS@orcl&gt; ALTER DATABASE TEMPFILE '/u01/app/oracle/oradata/orcl/temp01.dbf' DROP;</a:t>
             </a:r>
           </a:p>
           <a:p>
@@ -8929,7 +8929,7 @@
                 <a:latin typeface="Consolas"/>
                 <a:ea typeface="Consolas"/>
               </a:rPr>
-              <a:t>         2 /u01/app/oracle/oradata/ORCL/temp02.dbf    ONLINE</a:t>
+              <a:t>         2 /u01/app/oracle/oradata/orcl/temp02.dbf    ONLINE</a:t>
             </a:r>
           </a:p>
         </p:txBody>
@@ -9670,7 +9670,7 @@
                 <a:latin typeface="Consolas"/>
                 <a:ea typeface="Consolas"/>
               </a:rPr>
-              <a:t>  2    DATAFILE '/u02/oradata/ORCL/undotbs_new.dbf' SIZE 200M;</a:t>
+              <a:t>  2    DATAFILE '/u01/app/oracle/oradata/orcl/undotbs_new.dbf' SIZE 200M;</a:t>
             </a:r>
           </a:p>
           <a:p>
@@ -10366,7 +10366,7 @@
                 <a:latin typeface="Consolas"/>
                 <a:ea typeface="Consolas"/>
               </a:rPr>
-              <a:t>SYS@orcl&gt; !cp -p /u01/app/oracle/oradata/ORCL/hist01.dbf /home/oracle/backup/ch05/</a:t>
+              <a:t>SYS@orcl&gt; !cp -p /u01/app/oracle/oradata/orcl/hist01.dbf /home/oracle/backup/ch05/</a:t>
             </a:r>
           </a:p>
           <a:p>
@@ -10417,7 +10417,7 @@
                 <a:latin typeface="Consolas"/>
                 <a:ea typeface="Consolas"/>
               </a:rPr>
-              <a:t>SYS@orcl&gt; !rm -f /u01/app/oracle/oradata/ORCL/hist01.dbf</a:t>
+              <a:t>SYS@orcl&gt; !rm -f /u01/app/oracle/oradata/orcl/hist01.dbf</a:t>
             </a:r>
           </a:p>
           <a:p>
@@ -10451,7 +10451,7 @@
                 <a:latin typeface="Consolas"/>
                 <a:ea typeface="Consolas"/>
               </a:rPr>
-              <a:t>SYS@orcl&gt; !cp -p /home/oracle/backup/ch05/hist01.dbf /u01/app/oracle/oradata/ORCL/</a:t>
+              <a:t>SYS@orcl&gt; !cp -p /home/oracle/backup/ch05/hist01.dbf /u01/app/oracle/oradata/orcl/</a:t>
             </a:r>
           </a:p>
           <a:p>
@@ -11549,7 +11549,7 @@
                 <a:latin typeface="Consolas"/>
                 <a:ea typeface="Consolas"/>
               </a:rPr>
-              <a:t>[root@oel7v9r1 ~]# mkdir -p /u01/app/oracle/oradata/ORCL</a:t>
+              <a:t>[root@oel7v9r1 ~]# mkdir -p /u01/app/oracle/oradata/orcl</a:t>
             </a:r>
           </a:p>
           <a:p>
@@ -11600,41 +11600,41 @@
                 <a:latin typeface="Consolas"/>
                 <a:ea typeface="Consolas"/>
               </a:rPr>
-              <a:t>[oracle@oel7v9r1 ~]$ ls -l /u02/oradata/ORCL/</a:t>
-            </a:r>
-          </a:p>
-          <a:p>
-            <a:pPr>
-              <a:spcAft>
-                <a:spcPts val="0"/>
-              </a:spcAft>
-            </a:pPr>
-            <a:r>
-              <a:rPr sz="1250" b="0">
-                <a:solidFill>
-                  <a:srgbClr val="E6E6E6"/>
-                </a:solidFill>
-                <a:latin typeface="Consolas"/>
-                <a:ea typeface="Consolas"/>
-              </a:rPr>
-              <a:t>-rw-r-----. 1 oracle oinstall 10600448 May 10 09:12 control03.ctl</a:t>
-            </a:r>
-          </a:p>
-          <a:p>
-            <a:pPr>
-              <a:spcAft>
-                <a:spcPts val="0"/>
-              </a:spcAft>
-            </a:pPr>
-            <a:r>
-              <a:rPr sz="1250" b="0">
-                <a:solidFill>
-                  <a:srgbClr val="E6E6E6"/>
-                </a:solidFill>
-                <a:latin typeface="Consolas"/>
-                <a:ea typeface="Consolas"/>
-              </a:rPr>
-              <a:t>-rw-r-----. 1 oracle oinstall 10486272 May 10 09:12 redo01b.log</a:t>
+              <a:t>[oracle@oel7v9r1 ~]$ ls -l /u02/oradata/orcl/</a:t>
+            </a:r>
+          </a:p>
+          <a:p>
+            <a:pPr>
+              <a:spcAft>
+                <a:spcPts val="0"/>
+              </a:spcAft>
+            </a:pPr>
+            <a:r>
+              <a:rPr sz="1250" b="0">
+                <a:solidFill>
+                  <a:srgbClr val="E6E6E6"/>
+                </a:solidFill>
+                <a:latin typeface="Consolas"/>
+                <a:ea typeface="Consolas"/>
+              </a:rPr>
+              <a:t>-rw-r-----. 1 oracle dba 10600448 May 10 09:12 control03.ctl</a:t>
+            </a:r>
+          </a:p>
+          <a:p>
+            <a:pPr>
+              <a:spcAft>
+                <a:spcPts val="0"/>
+              </a:spcAft>
+            </a:pPr>
+            <a:r>
+              <a:rPr sz="1250" b="0">
+                <a:solidFill>
+                  <a:srgbClr val="E6E6E6"/>
+                </a:solidFill>
+                <a:latin typeface="Consolas"/>
+                <a:ea typeface="Consolas"/>
+              </a:rPr>
+              <a:t>-rw-r-----. 1 oracle dba 10486272 May 10 09:12 redo01b.log</a:t>
             </a:r>
           </a:p>
           <a:p>
@@ -11685,24 +11685,24 @@
                 <a:latin typeface="Consolas"/>
                 <a:ea typeface="Consolas"/>
               </a:rPr>
-              <a:t>[oracle@oel7v9r1 ~]$ cp -p /u02/oradata/ORCL/control03.ctl \</a:t>
-            </a:r>
-          </a:p>
-          <a:p>
-            <a:pPr>
-              <a:spcAft>
-                <a:spcPts val="0"/>
-              </a:spcAft>
-            </a:pPr>
-            <a:r>
-              <a:rPr sz="1250" b="0">
-                <a:solidFill>
-                  <a:srgbClr val="E6E6E6"/>
-                </a:solidFill>
-                <a:latin typeface="Consolas"/>
-                <a:ea typeface="Consolas"/>
-              </a:rPr>
-              <a:t>        /u01/app/oracle/oradata/ORCL/control01.ctl</a:t>
+              <a:t>[oracle@oel7v9r1 ~]$ cp -p /u02/oradata/orcl/control03.ctl \</a:t>
+            </a:r>
+          </a:p>
+          <a:p>
+            <a:pPr>
+              <a:spcAft>
+                <a:spcPts val="0"/>
+              </a:spcAft>
+            </a:pPr>
+            <a:r>
+              <a:rPr sz="1250" b="0">
+                <a:solidFill>
+                  <a:srgbClr val="E6E6E6"/>
+                </a:solidFill>
+                <a:latin typeface="Consolas"/>
+                <a:ea typeface="Consolas"/>
+              </a:rPr>
+              <a:t>        /u01/app/oracle/oradata/orcl/control01.ctl</a:t>
             </a:r>
           </a:p>
           <a:p>
@@ -11753,7 +11753,7 @@
                 <a:latin typeface="Consolas"/>
                 <a:ea typeface="Consolas"/>
               </a:rPr>
-              <a:t>[oracle@oel7v9r1 ~]$ cp -p /home/oracle/backup/ch05/*.dbf /u01/app/oracle/oradata/ORCL/</a:t>
+              <a:t>[oracle@oel7v9r1 ~]$ cp -p /home/oracle/backup/ch05/*.dbf /u01/app/oracle/oradata/orcl/</a:t>
             </a:r>
           </a:p>
           <a:p>
@@ -12191,7 +12191,7 @@
                 <a:latin typeface="Consolas"/>
                 <a:ea typeface="Consolas"/>
               </a:rPr>
-              <a:t>*.control_files='/u03/oradata/ORCL/control01.ctl','/u02/oradata/ORCL/control03.ctl'</a:t>
+              <a:t>*.control_files='/u03/oradata/ORCL/control01.ctl','/u02/oradata/orcl/control03.ctl'</a:t>
             </a:r>
           </a:p>
           <a:p>
@@ -12242,7 +12242,7 @@
                 <a:latin typeface="Consolas"/>
                 <a:ea typeface="Consolas"/>
               </a:rPr>
-              <a:t>[oracle@oel7v9r1 ~]$ cp -p /u02/oradata/ORCL/control03.ctl /u03/oradata/ORCL/control01.ctl</a:t>
+              <a:t>[oracle@oel7v9r1 ~]$ cp -p /u02/oradata/orcl/control03.ctl /u03/oradata/ORCL/control01.ctl</a:t>
             </a:r>
           </a:p>
           <a:p>
@@ -12361,7 +12361,7 @@
                 <a:latin typeface="Consolas"/>
                 <a:ea typeface="Consolas"/>
               </a:rPr>
-              <a:t>  2    '/u01/app/oracle/oradata/ORCL/system01.dbf'</a:t>
+              <a:t>  2    '/u01/app/oracle/oradata/orcl/system01.dbf'</a:t>
             </a:r>
           </a:p>
           <a:p>
@@ -13403,7 +13403,7 @@
                 <a:latin typeface="Consolas"/>
                 <a:ea typeface="Consolas"/>
               </a:rPr>
-              <a:t>ORA-00312: online log 1 thread 1: '/u01/app/oracle/oradata/ORCL/redo01.log'</a:t>
+              <a:t>ORA-00312: online log 1 thread 1: '/u01/app/oracle/oradata/orcl/redo01.log'</a:t>
             </a:r>
           </a:p>
           <a:p>
@@ -17854,7 +17854,7 @@
                 <a:latin typeface="Consolas"/>
                 <a:ea typeface="Consolas"/>
               </a:rPr>
-              <a:t>ORA-01110: data file 4: '/u01/app/oracle/oradata/ORCL/undotbs01.dbf'</a:t>
+              <a:t>ORA-01110: data file 4: '/u01/app/oracle/oradata/orcl/undotbs01.dbf'</a:t>
             </a:r>
           </a:p>
           <a:p>
@@ -18748,7 +18748,7 @@
                 <a:latin typeface="Consolas"/>
                 <a:ea typeface="Consolas"/>
               </a:rPr>
-              <a:t>  2    DATAFILE '/u02/oradata/ORCL/undotbs02.dbf' SIZE 200M AUTOEXTEND ON;</a:t>
+              <a:t>  2    DATAFILE '/u01/app/oracle/oradata/orcl/undotbs02.dbf' SIZE 200M AUTOEXTEND ON;</a:t>
             </a:r>
           </a:p>
           <a:p>
